--- a/GLOBAL COVID-19 Project.pptx
+++ b/GLOBAL COVID-19 Project.pptx
@@ -311,7 +311,7 @@
           <a:p>
             <a:fld id="{EEE86641-1510-47DE-9CFE-522BA1651CCA}" type="datetimeFigureOut">
               <a:rPr lang="en-US" smtClean="0"/>
-              <a:t>1/22/2026</a:t>
+              <a:t>4/21/2026</a:t>
             </a:fld>
             <a:endParaRPr lang="en-US"/>
           </a:p>
@@ -586,7 +586,7 @@
           <a:p>
             <a:fld id="{EEE86641-1510-47DE-9CFE-522BA1651CCA}" type="datetimeFigureOut">
               <a:rPr lang="en-US" smtClean="0"/>
-              <a:t>1/22/2026</a:t>
+              <a:t>4/21/2026</a:t>
             </a:fld>
             <a:endParaRPr lang="en-US"/>
           </a:p>
@@ -780,7 +780,7 @@
           <a:p>
             <a:fld id="{EEE86641-1510-47DE-9CFE-522BA1651CCA}" type="datetimeFigureOut">
               <a:rPr lang="en-US" smtClean="0"/>
-              <a:t>1/22/2026</a:t>
+              <a:t>4/21/2026</a:t>
             </a:fld>
             <a:endParaRPr lang="en-US"/>
           </a:p>
@@ -1051,7 +1051,7 @@
           <a:p>
             <a:fld id="{EEE86641-1510-47DE-9CFE-522BA1651CCA}" type="datetimeFigureOut">
               <a:rPr lang="en-US" smtClean="0"/>
-              <a:t>1/22/2026</a:t>
+              <a:t>4/21/2026</a:t>
             </a:fld>
             <a:endParaRPr lang="en-US"/>
           </a:p>
@@ -1378,7 +1378,7 @@
           <a:p>
             <a:fld id="{EEE86641-1510-47DE-9CFE-522BA1651CCA}" type="datetimeFigureOut">
               <a:rPr lang="en-US" smtClean="0"/>
-              <a:t>1/22/2026</a:t>
+              <a:t>4/21/2026</a:t>
             </a:fld>
             <a:endParaRPr lang="en-US"/>
           </a:p>
@@ -1997,7 +1997,7 @@
           <a:p>
             <a:fld id="{EEE86641-1510-47DE-9CFE-522BA1651CCA}" type="datetimeFigureOut">
               <a:rPr lang="en-US" smtClean="0"/>
-              <a:t>1/22/2026</a:t>
+              <a:t>4/21/2026</a:t>
             </a:fld>
             <a:endParaRPr lang="en-US"/>
           </a:p>
@@ -2844,7 +2844,7 @@
           <a:p>
             <a:fld id="{EEE86641-1510-47DE-9CFE-522BA1651CCA}" type="datetimeFigureOut">
               <a:rPr lang="en-US" smtClean="0"/>
-              <a:t>1/22/2026</a:t>
+              <a:t>4/21/2026</a:t>
             </a:fld>
             <a:endParaRPr lang="en-US"/>
           </a:p>
@@ -3014,7 +3014,7 @@
           <a:p>
             <a:fld id="{EEE86641-1510-47DE-9CFE-522BA1651CCA}" type="datetimeFigureOut">
               <a:rPr lang="en-US" smtClean="0"/>
-              <a:t>1/22/2026</a:t>
+              <a:t>4/21/2026</a:t>
             </a:fld>
             <a:endParaRPr lang="en-US"/>
           </a:p>
@@ -3194,7 +3194,7 @@
           <a:p>
             <a:fld id="{EEE86641-1510-47DE-9CFE-522BA1651CCA}" type="datetimeFigureOut">
               <a:rPr lang="en-US" smtClean="0"/>
-              <a:t>1/22/2026</a:t>
+              <a:t>4/21/2026</a:t>
             </a:fld>
             <a:endParaRPr lang="en-US"/>
           </a:p>
@@ -3364,7 +3364,7 @@
           <a:p>
             <a:fld id="{EEE86641-1510-47DE-9CFE-522BA1651CCA}" type="datetimeFigureOut">
               <a:rPr lang="en-US" smtClean="0"/>
-              <a:t>1/22/2026</a:t>
+              <a:t>4/21/2026</a:t>
             </a:fld>
             <a:endParaRPr lang="en-US"/>
           </a:p>
@@ -3611,7 +3611,7 @@
           <a:p>
             <a:fld id="{EEE86641-1510-47DE-9CFE-522BA1651CCA}" type="datetimeFigureOut">
               <a:rPr lang="en-US" smtClean="0"/>
-              <a:t>1/22/2026</a:t>
+              <a:t>4/21/2026</a:t>
             </a:fld>
             <a:endParaRPr lang="en-US"/>
           </a:p>
@@ -3903,7 +3903,7 @@
           <a:p>
             <a:fld id="{EEE86641-1510-47DE-9CFE-522BA1651CCA}" type="datetimeFigureOut">
               <a:rPr lang="en-US" smtClean="0"/>
-              <a:t>1/22/2026</a:t>
+              <a:t>4/21/2026</a:t>
             </a:fld>
             <a:endParaRPr lang="en-US"/>
           </a:p>
@@ -4347,7 +4347,7 @@
           <a:p>
             <a:fld id="{EEE86641-1510-47DE-9CFE-522BA1651CCA}" type="datetimeFigureOut">
               <a:rPr lang="en-US" smtClean="0"/>
-              <a:t>1/22/2026</a:t>
+              <a:t>4/21/2026</a:t>
             </a:fld>
             <a:endParaRPr lang="en-US"/>
           </a:p>
@@ -4465,7 +4465,7 @@
           <a:p>
             <a:fld id="{EEE86641-1510-47DE-9CFE-522BA1651CCA}" type="datetimeFigureOut">
               <a:rPr lang="en-US" smtClean="0"/>
-              <a:t>1/22/2026</a:t>
+              <a:t>4/21/2026</a:t>
             </a:fld>
             <a:endParaRPr lang="en-US"/>
           </a:p>
@@ -4560,7 +4560,7 @@
           <a:p>
             <a:fld id="{EEE86641-1510-47DE-9CFE-522BA1651CCA}" type="datetimeFigureOut">
               <a:rPr lang="en-US" smtClean="0"/>
-              <a:t>1/22/2026</a:t>
+              <a:t>4/21/2026</a:t>
             </a:fld>
             <a:endParaRPr lang="en-US"/>
           </a:p>
@@ -4839,7 +4839,7 @@
           <a:p>
             <a:fld id="{EEE86641-1510-47DE-9CFE-522BA1651CCA}" type="datetimeFigureOut">
               <a:rPr lang="en-US" smtClean="0"/>
-              <a:t>1/22/2026</a:t>
+              <a:t>4/21/2026</a:t>
             </a:fld>
             <a:endParaRPr lang="en-US"/>
           </a:p>
@@ -5114,7 +5114,7 @@
           <a:p>
             <a:fld id="{EEE86641-1510-47DE-9CFE-522BA1651CCA}" type="datetimeFigureOut">
               <a:rPr lang="en-US" smtClean="0"/>
-              <a:t>1/22/2026</a:t>
+              <a:t>4/21/2026</a:t>
             </a:fld>
             <a:endParaRPr lang="en-US"/>
           </a:p>
@@ -5537,7 +5537,7 @@
           <a:p>
             <a:fld id="{EEE86641-1510-47DE-9CFE-522BA1651CCA}" type="datetimeFigureOut">
               <a:rPr lang="en-US" smtClean="0"/>
-              <a:t>1/22/2026</a:t>
+              <a:t>4/21/2026</a:t>
             </a:fld>
             <a:endParaRPr lang="en-US"/>
           </a:p>
@@ -6209,10 +6209,10 @@
       </p:sp>
       <p:pic>
         <p:nvPicPr>
-          <p:cNvPr id="4" name="Content Placeholder 3">
+          <p:cNvPr id="7" name="Content Placeholder 6">
             <a:extLst>
               <a:ext uri="{FF2B5EF4-FFF2-40B4-BE49-F238E27FC236}">
-                <a16:creationId xmlns:a16="http://schemas.microsoft.com/office/drawing/2014/main" id="{00106CEB-9A93-1D8F-9547-1DE9288FA8D5}"/>
+                <a16:creationId xmlns:a16="http://schemas.microsoft.com/office/drawing/2014/main" id="{30DE3E60-DA57-2EB4-96CC-DF4BE4DB54AA}"/>
               </a:ext>
             </a:extLst>
           </p:cNvPr>
@@ -6237,8 +6237,8 @@
         </p:blipFill>
         <p:spPr>
           <a:xfrm>
-            <a:off x="1582425" y="1689962"/>
-            <a:ext cx="7992000" cy="4443238"/>
+            <a:off x="1865724" y="2052638"/>
+            <a:ext cx="7422328" cy="4195762"/>
           </a:xfrm>
           <a:prstGeom prst="rect">
             <a:avLst/>
@@ -6305,10 +6305,10 @@
       </p:sp>
       <p:pic>
         <p:nvPicPr>
-          <p:cNvPr id="4" name="Content Placeholder 4">
+          <p:cNvPr id="7" name="Content Placeholder 6">
             <a:extLst>
               <a:ext uri="{FF2B5EF4-FFF2-40B4-BE49-F238E27FC236}">
-                <a16:creationId xmlns:a16="http://schemas.microsoft.com/office/drawing/2014/main" id="{9D6E86B4-2E3C-3656-FA0E-52BB48739A4D}"/>
+                <a16:creationId xmlns:a16="http://schemas.microsoft.com/office/drawing/2014/main" id="{5A6D2465-9860-6FDE-EF00-A058090ACCE1}"/>
               </a:ext>
             </a:extLst>
           </p:cNvPr>
@@ -6333,9 +6333,12 @@
         </p:blipFill>
         <p:spPr>
           <a:xfrm>
-            <a:off x="1639810" y="1711733"/>
-            <a:ext cx="8059359" cy="4428000"/>
-          </a:xfrm>
+            <a:off x="1854841" y="2052638"/>
+            <a:ext cx="7444093" cy="4195762"/>
+          </a:xfrm>
+          <a:prstGeom prst="rect">
+            <a:avLst/>
+          </a:prstGeom>
         </p:spPr>
       </p:pic>
     </p:spTree>
@@ -6401,7 +6404,7 @@
           <p:cNvPr id="6" name="Content Placeholder 5">
             <a:extLst>
               <a:ext uri="{FF2B5EF4-FFF2-40B4-BE49-F238E27FC236}">
-                <a16:creationId xmlns:a16="http://schemas.microsoft.com/office/drawing/2014/main" id="{C4AE0C28-12F3-94D8-D3D0-69422326B290}"/>
+                <a16:creationId xmlns:a16="http://schemas.microsoft.com/office/drawing/2014/main" id="{A28E158D-5947-AFA8-5FA3-27623C4BD222}"/>
               </a:ext>
             </a:extLst>
           </p:cNvPr>
@@ -6426,8 +6429,8 @@
         </p:blipFill>
         <p:spPr>
           <a:xfrm>
-            <a:off x="1701733" y="1668192"/>
-            <a:ext cx="7941600" cy="4421155"/>
+            <a:off x="1832217" y="2052638"/>
+            <a:ext cx="7489342" cy="4195762"/>
           </a:xfrm>
           <a:prstGeom prst="rect">
             <a:avLst/>
@@ -6494,10 +6497,10 @@
       </p:sp>
       <p:pic>
         <p:nvPicPr>
-          <p:cNvPr id="9" name="Content Placeholder 8">
+          <p:cNvPr id="6" name="Content Placeholder 5">
             <a:extLst>
               <a:ext uri="{FF2B5EF4-FFF2-40B4-BE49-F238E27FC236}">
-                <a16:creationId xmlns:a16="http://schemas.microsoft.com/office/drawing/2014/main" id="{DED2F48D-5B2F-DBDC-31FC-4062A797358A}"/>
+                <a16:creationId xmlns:a16="http://schemas.microsoft.com/office/drawing/2014/main" id="{3438717D-D465-A101-9A07-FCFBA5067716}"/>
               </a:ext>
             </a:extLst>
           </p:cNvPr>
@@ -6522,8 +6525,8 @@
         </p:blipFill>
         <p:spPr>
           <a:xfrm>
-            <a:off x="1749293" y="1597306"/>
-            <a:ext cx="7942652" cy="4428000"/>
+            <a:off x="1836385" y="2052638"/>
+            <a:ext cx="7481006" cy="4195762"/>
           </a:xfrm>
           <a:prstGeom prst="rect">
             <a:avLst/>
@@ -7273,7 +7276,7 @@
           <a:p>
             <a:r>
               <a:rPr lang="en-US" dirty="0"/>
-              <a:t>These values show there was a 1% case fatality rate.</a:t>
+              <a:t>These values show there was a 1.09% case fatality rate.</a:t>
             </a:r>
           </a:p>
         </p:txBody>
@@ -7334,7 +7337,7 @@
           <a:p>
             <a:r>
               <a:rPr lang="en-US" dirty="0"/>
-              <a:t>From the trends chart it was noted that the year 2023 had the most cases recorded with an estimated 10 trillion cases recorded.</a:t>
+              <a:t>From the trends chart it was noted that the year 2023 had the most cases recorded with an estimated over 103 million cases recorded.</a:t>
             </a:r>
           </a:p>
         </p:txBody>
@@ -7395,7 +7398,7 @@
           <a:p>
             <a:r>
               <a:rPr lang="en-US" dirty="0"/>
-              <a:t>It was noted from the trends chart, that the year 2022 had the most recorded deaths with an estimated value of 92 billion deaths recorded.</a:t>
+              <a:t>It was noted from the trends chart, that the year 2023 had the most recorded deaths with an estimated value of over 1.1 million deaths recorded.</a:t>
             </a:r>
           </a:p>
           <a:p>
@@ -7408,10 +7411,10 @@
       </p:sp>
       <p:pic>
         <p:nvPicPr>
-          <p:cNvPr id="10" name="Picture 9">
+          <p:cNvPr id="11" name="Picture 10">
             <a:extLst>
               <a:ext uri="{FF2B5EF4-FFF2-40B4-BE49-F238E27FC236}">
-                <a16:creationId xmlns:a16="http://schemas.microsoft.com/office/drawing/2014/main" id="{E2FE6567-2AE4-1553-02B4-EAE06F084141}"/>
+                <a16:creationId xmlns:a16="http://schemas.microsoft.com/office/drawing/2014/main" id="{B6F4F088-A397-173C-B52E-389BA0344F79}"/>
               </a:ext>
             </a:extLst>
           </p:cNvPr>
@@ -7434,8 +7437,8 @@
         </p:blipFill>
         <p:spPr>
           <a:xfrm>
-            <a:off x="782567" y="3117834"/>
-            <a:ext cx="1352620" cy="622332"/>
+            <a:off x="782567" y="3246583"/>
+            <a:ext cx="1346269" cy="609631"/>
           </a:xfrm>
           <a:prstGeom prst="rect">
             <a:avLst/>
@@ -7444,10 +7447,10 @@
       </p:pic>
       <p:pic>
         <p:nvPicPr>
-          <p:cNvPr id="12" name="Picture 11">
+          <p:cNvPr id="15" name="Picture 14">
             <a:extLst>
               <a:ext uri="{FF2B5EF4-FFF2-40B4-BE49-F238E27FC236}">
-                <a16:creationId xmlns:a16="http://schemas.microsoft.com/office/drawing/2014/main" id="{041B4A85-0219-6975-3E20-C2E3C8578F1B}"/>
+                <a16:creationId xmlns:a16="http://schemas.microsoft.com/office/drawing/2014/main" id="{D6462978-1171-F201-4314-F4AB9D0CA605}"/>
               </a:ext>
             </a:extLst>
           </p:cNvPr>
@@ -7470,8 +7473,8 @@
         </p:blipFill>
         <p:spPr>
           <a:xfrm>
-            <a:off x="782567" y="4680735"/>
-            <a:ext cx="1371670" cy="622333"/>
+            <a:off x="782567" y="4843931"/>
+            <a:ext cx="1339919" cy="609631"/>
           </a:xfrm>
           <a:prstGeom prst="rect">
             <a:avLst/>
@@ -7480,10 +7483,10 @@
       </p:pic>
       <p:pic>
         <p:nvPicPr>
-          <p:cNvPr id="14" name="Picture 13">
+          <p:cNvPr id="17" name="Picture 16">
             <a:extLst>
               <a:ext uri="{FF2B5EF4-FFF2-40B4-BE49-F238E27FC236}">
-                <a16:creationId xmlns:a16="http://schemas.microsoft.com/office/drawing/2014/main" id="{6F2AB82F-1A74-2BDE-F096-5C6D51FF987B}"/>
+                <a16:creationId xmlns:a16="http://schemas.microsoft.com/office/drawing/2014/main" id="{B93BB798-3664-2DFE-B4BB-C724DE2F5E25}"/>
               </a:ext>
             </a:extLst>
           </p:cNvPr>
@@ -7506,7 +7509,7 @@
         </p:blipFill>
         <p:spPr>
           <a:xfrm>
-            <a:off x="4034774" y="3958049"/>
+            <a:off x="4040528" y="4001417"/>
             <a:ext cx="2623457" cy="1685028"/>
           </a:xfrm>
           <a:prstGeom prst="rect">
@@ -7516,10 +7519,10 @@
       </p:pic>
       <p:pic>
         <p:nvPicPr>
-          <p:cNvPr id="18" name="Picture 17">
+          <p:cNvPr id="22" name="Picture 21">
             <a:extLst>
               <a:ext uri="{FF2B5EF4-FFF2-40B4-BE49-F238E27FC236}">
-                <a16:creationId xmlns:a16="http://schemas.microsoft.com/office/drawing/2014/main" id="{49B35070-CFE7-C9A2-5201-7F82871A54C9}"/>
+                <a16:creationId xmlns:a16="http://schemas.microsoft.com/office/drawing/2014/main" id="{E5F72CD0-B306-4C60-8925-0CB4890AC384}"/>
               </a:ext>
             </a:extLst>
           </p:cNvPr>
@@ -7542,8 +7545,8 @@
         </p:blipFill>
         <p:spPr>
           <a:xfrm>
-            <a:off x="7254137" y="3958049"/>
-            <a:ext cx="2673237" cy="1685028"/>
+            <a:off x="7124700" y="4001418"/>
+            <a:ext cx="2673237" cy="1685027"/>
           </a:xfrm>
           <a:prstGeom prst="rect">
             <a:avLst/>
@@ -7910,7 +7913,7 @@
             </a:pPr>
             <a:r>
               <a:rPr lang="en-US" sz="1400" dirty="0"/>
-              <a:t>It could be noted from the visual that Europe was most affected by the pandemic, followed by Asia.</a:t>
+              <a:t>It could be noted from the visual that North America was most affected by the pandemic, followed by South America.</a:t>
             </a:r>
           </a:p>
           <a:p>
@@ -7976,7 +7979,7 @@
             </a:pPr>
             <a:r>
               <a:rPr lang="en-US" sz="1400" dirty="0"/>
-              <a:t>From the examination of the visual, Vatican city had the highest mortality rate. The next most affected country was Vietnam.</a:t>
+              <a:t>From the examination of the visual, United States had the highest mortality rate. The next most affected country was Brazil.</a:t>
             </a:r>
           </a:p>
           <a:p>
@@ -7995,10 +7998,10 @@
       </p:sp>
       <p:pic>
         <p:nvPicPr>
-          <p:cNvPr id="6" name="Picture 5">
+          <p:cNvPr id="7" name="Picture 6">
             <a:extLst>
               <a:ext uri="{FF2B5EF4-FFF2-40B4-BE49-F238E27FC236}">
-                <a16:creationId xmlns:a16="http://schemas.microsoft.com/office/drawing/2014/main" id="{8A1D79C5-D3AE-DAE0-2694-69C1E28B44C6}"/>
+                <a16:creationId xmlns:a16="http://schemas.microsoft.com/office/drawing/2014/main" id="{D32D37F2-1C38-81AD-CE10-379C998AC393}"/>
               </a:ext>
             </a:extLst>
           </p:cNvPr>
@@ -8021,7 +8024,7 @@
         </p:blipFill>
         <p:spPr>
           <a:xfrm>
-            <a:off x="1185853" y="4156214"/>
+            <a:off x="1237649" y="4156213"/>
             <a:ext cx="3560318" cy="1665514"/>
           </a:xfrm>
           <a:prstGeom prst="rect">
@@ -8031,10 +8034,10 @@
       </p:pic>
       <p:pic>
         <p:nvPicPr>
-          <p:cNvPr id="8" name="Picture 7">
+          <p:cNvPr id="10" name="Picture 9">
             <a:extLst>
               <a:ext uri="{FF2B5EF4-FFF2-40B4-BE49-F238E27FC236}">
-                <a16:creationId xmlns:a16="http://schemas.microsoft.com/office/drawing/2014/main" id="{78B6C8EC-4095-B64C-8917-700DCA40AA97}"/>
+                <a16:creationId xmlns:a16="http://schemas.microsoft.com/office/drawing/2014/main" id="{F15A82B7-4936-9D3C-90DE-E1510B1E4589}"/>
               </a:ext>
             </a:extLst>
           </p:cNvPr>
@@ -8057,8 +8060,8 @@
         </p:blipFill>
         <p:spPr>
           <a:xfrm>
-            <a:off x="5816538" y="4156213"/>
-            <a:ext cx="3543937" cy="1665515"/>
+            <a:off x="5654493" y="4156213"/>
+            <a:ext cx="3543937" cy="1665514"/>
           </a:xfrm>
           <a:prstGeom prst="rect">
             <a:avLst/>
@@ -8217,7 +8220,7 @@
             </a:pPr>
             <a:r>
               <a:rPr lang="en-US" sz="1400" dirty="0"/>
-              <a:t>The gauge visualization indicates that the number of available vaccine doses exceeded the number of individuals vaccinated, suggesting that sufficient vaccination was available for prevention. This surplus may be attributed to factors related to vaccine availability or uptake.</a:t>
+              <a:t>The chart visualization indicates that the number of available vaccine doses exceeded the number of individuals vaccinated, suggesting that sufficient vaccination was available for prevention. This surplus may be attributed to factors related to vaccine availability or uptake.</a:t>
             </a:r>
           </a:p>
           <a:p>
@@ -8266,10 +8269,10 @@
       </p:pic>
       <p:pic>
         <p:nvPicPr>
-          <p:cNvPr id="8" name="Picture 7">
+          <p:cNvPr id="7" name="Picture 6">
             <a:extLst>
               <a:ext uri="{FF2B5EF4-FFF2-40B4-BE49-F238E27FC236}">
-                <a16:creationId xmlns:a16="http://schemas.microsoft.com/office/drawing/2014/main" id="{B397A108-B966-AC11-C61A-8DE24CAC38A2}"/>
+                <a16:creationId xmlns:a16="http://schemas.microsoft.com/office/drawing/2014/main" id="{C1636B09-EA9E-3AE8-1C3A-F57284422F13}"/>
               </a:ext>
             </a:extLst>
           </p:cNvPr>
@@ -8292,7 +8295,7 @@
         </p:blipFill>
         <p:spPr>
           <a:xfrm>
-            <a:off x="6573568" y="4526328"/>
+            <a:off x="6284200" y="4526328"/>
             <a:ext cx="2820804" cy="1589314"/>
           </a:xfrm>
           <a:prstGeom prst="rect">
@@ -8407,10 +8410,10 @@
       </p:sp>
       <p:pic>
         <p:nvPicPr>
-          <p:cNvPr id="5" name="Picture 4">
+          <p:cNvPr id="6" name="Picture 5">
             <a:extLst>
               <a:ext uri="{FF2B5EF4-FFF2-40B4-BE49-F238E27FC236}">
-                <a16:creationId xmlns:a16="http://schemas.microsoft.com/office/drawing/2014/main" id="{737D18ED-A441-7F7A-91C5-85873453BA01}"/>
+                <a16:creationId xmlns:a16="http://schemas.microsoft.com/office/drawing/2014/main" id="{D4303D40-BD2E-8BC5-2666-52395D2F3DC2}"/>
               </a:ext>
             </a:extLst>
           </p:cNvPr>
@@ -8433,8 +8436,8 @@
         </p:blipFill>
         <p:spPr>
           <a:xfrm>
-            <a:off x="7135697" y="4521163"/>
-            <a:ext cx="2940201" cy="1409772"/>
+            <a:off x="7233271" y="4533863"/>
+            <a:ext cx="2953223" cy="1409772"/>
           </a:xfrm>
           <a:prstGeom prst="rect">
             <a:avLst/>
@@ -8443,10 +8446,10 @@
       </p:pic>
       <p:pic>
         <p:nvPicPr>
-          <p:cNvPr id="7" name="Picture 6">
+          <p:cNvPr id="10" name="Picture 9">
             <a:extLst>
               <a:ext uri="{FF2B5EF4-FFF2-40B4-BE49-F238E27FC236}">
-                <a16:creationId xmlns:a16="http://schemas.microsoft.com/office/drawing/2014/main" id="{716A6A66-2024-0FFC-4BF9-EAE1BC374BBF}"/>
+                <a16:creationId xmlns:a16="http://schemas.microsoft.com/office/drawing/2014/main" id="{E7755B7C-5987-C7EE-8D12-86AE784D1ACF}"/>
               </a:ext>
             </a:extLst>
           </p:cNvPr>
@@ -8469,8 +8472,8 @@
         </p:blipFill>
         <p:spPr>
           <a:xfrm>
-            <a:off x="4109657" y="4546564"/>
-            <a:ext cx="2889398" cy="1384371"/>
+            <a:off x="1077267" y="4546564"/>
+            <a:ext cx="2895748" cy="1428822"/>
           </a:xfrm>
           <a:prstGeom prst="rect">
             <a:avLst/>
@@ -8479,10 +8482,10 @@
       </p:pic>
       <p:pic>
         <p:nvPicPr>
-          <p:cNvPr id="9" name="Picture 8">
+          <p:cNvPr id="12" name="Picture 11">
             <a:extLst>
               <a:ext uri="{FF2B5EF4-FFF2-40B4-BE49-F238E27FC236}">
-                <a16:creationId xmlns:a16="http://schemas.microsoft.com/office/drawing/2014/main" id="{62136005-36FF-A564-F479-7C6F18796EA1}"/>
+                <a16:creationId xmlns:a16="http://schemas.microsoft.com/office/drawing/2014/main" id="{5271B753-AB9F-1063-DBD8-BD7A7F598986}"/>
               </a:ext>
             </a:extLst>
           </p:cNvPr>
@@ -8505,8 +8508,8 @@
         </p:blipFill>
         <p:spPr>
           <a:xfrm>
-            <a:off x="1077267" y="4527513"/>
-            <a:ext cx="2895749" cy="1403422"/>
+            <a:off x="4155269" y="4533863"/>
+            <a:ext cx="2895748" cy="1409772"/>
           </a:xfrm>
           <a:prstGeom prst="rect">
             <a:avLst/>
@@ -8573,10 +8576,10 @@
       </p:sp>
       <p:pic>
         <p:nvPicPr>
-          <p:cNvPr id="4" name="Content Placeholder 3">
+          <p:cNvPr id="7" name="Content Placeholder 6">
             <a:extLst>
               <a:ext uri="{FF2B5EF4-FFF2-40B4-BE49-F238E27FC236}">
-                <a16:creationId xmlns:a16="http://schemas.microsoft.com/office/drawing/2014/main" id="{D83E1A28-1630-99E8-9131-EA2EEFB5857D}"/>
+                <a16:creationId xmlns:a16="http://schemas.microsoft.com/office/drawing/2014/main" id="{573023B6-DE89-3579-6696-1480B08B7E54}"/>
               </a:ext>
             </a:extLst>
           </p:cNvPr>
@@ -8601,8 +8604,8 @@
         </p:blipFill>
         <p:spPr>
           <a:xfrm>
-            <a:off x="1598312" y="1758724"/>
-            <a:ext cx="8056978" cy="4464000"/>
+            <a:off x="1830892" y="2052638"/>
+            <a:ext cx="7491992" cy="4195762"/>
           </a:xfrm>
           <a:prstGeom prst="rect">
             <a:avLst/>
